--- a/yunqi-2026-pai-forum/docs/洞察一页-06-企业工程化AI提效：知识、流程和智能系统.pptx
+++ b/yunqi-2026-pai-forum/docs/洞察一页-06-企业工程化AI提效：知识、流程和智能系统.pptx
@@ -3141,7 +3141,7 @@
         <p:spPr>
           <a:xfrm>
             <a:off x="0" y="0"/>
-            <a:ext cx="12191695" cy="1051560"/>
+            <a:ext cx="12191695" cy="1097280"/>
           </a:xfrm>
           <a:prstGeom prst="rect">
             <a:avLst/>
@@ -3183,8 +3183,8 @@
         </p:nvSpPr>
         <p:spPr>
           <a:xfrm>
-            <a:off x="365760" y="146304"/>
-            <a:ext cx="11430000" cy="274320"/>
+            <a:off x="320040" y="91440"/>
+            <a:ext cx="11521440" cy="237744"/>
           </a:xfrm>
           <a:prstGeom prst="rect">
             <a:avLst/>
@@ -3199,7 +3199,7 @@
           <a:p>
             <a:pPr algn="l"/>
             <a:r>
-              <a:rPr sz="1300" b="0">
+              <a:rPr sz="1200" b="0">
                 <a:solidFill>
                   <a:srgbClr val="6B6B6B"/>
                 </a:solidFill>
@@ -3219,8 +3219,8 @@
         </p:nvSpPr>
         <p:spPr>
           <a:xfrm>
-            <a:off x="365760" y="420624"/>
-            <a:ext cx="11430000" cy="502920"/>
+            <a:off x="320040" y="347472"/>
+            <a:ext cx="11521440" cy="658368"/>
           </a:xfrm>
           <a:prstGeom prst="rect">
             <a:avLst/>
@@ -3235,14 +3235,14 @@
           <a:p>
             <a:pPr algn="l"/>
             <a:r>
-              <a:rPr sz="2000" b="1">
+              <a:rPr sz="1600" b="1">
                 <a:solidFill>
                   <a:srgbClr val="1A1A1A"/>
                 </a:solidFill>
                 <a:latin typeface="Microsoft YaHei"/>
                 <a:ea typeface="Microsoft YaHei"/>
               </a:rPr>
-              <a:t>洞察：企业工程化AI的胜负手不是单点模型，而是「知识骨架 + MCP工具原子化 + Agent分工 …</a:t>
+              <a:t>洞察：企业工程化AI的胜负手不是单点模型，而是「知识骨架 + MCP工具原子化 + Agent分工 + 合规横切」。</a:t>
             </a:r>
           </a:p>
         </p:txBody>
@@ -3255,8 +3255,8 @@
         </p:nvSpPr>
         <p:spPr>
           <a:xfrm>
-            <a:off x="320040" y="1207008"/>
-            <a:ext cx="11521440" cy="502920"/>
+            <a:off x="274320" y="1207008"/>
+            <a:ext cx="11612880" cy="749808"/>
           </a:xfrm>
           <a:prstGeom prst="rect">
             <a:avLst/>
@@ -3300,8 +3300,8 @@
         </p:nvSpPr>
         <p:spPr>
           <a:xfrm>
-            <a:off x="457200" y="1298448"/>
-            <a:ext cx="11247120" cy="365760"/>
+            <a:off x="411480" y="1261872"/>
+            <a:ext cx="11338560" cy="640080"/>
           </a:xfrm>
           <a:prstGeom prst="rect">
             <a:avLst/>
@@ -3316,14 +3316,14 @@
           <a:p>
             <a:pPr algn="l"/>
             <a:r>
-              <a:rPr sz="1300" b="1">
+              <a:rPr sz="1200" b="1">
                 <a:solidFill>
                   <a:srgbClr val="1A1A1A"/>
                 </a:solidFill>
                 <a:latin typeface="Microsoft YaHei"/>
                 <a:ea typeface="Microsoft YaHei"/>
               </a:rPr>
-              <a:t>一句话判断：蒋忠波分享大众CARIAD如何把「个人用好大模型」升级为「企业工程化AI提效」。核心矛盾是LLM的概率性本质与汽车软件工程对规模、复杂度、协作与稳定产出的刚性要求。演讲给出CEA AI效能平台三层架构（模型服务 / H…</a:t>
+              <a:t>一句话判断：蒋忠波分享大众CARIAD如何把「个人用好大模型」升级为「企业工程化AI提效」。核心矛盾是LLM的概率性本质与汽车软件工程对规模、复杂度、协作与稳定产出的刚性要求。</a:t>
             </a:r>
           </a:p>
         </p:txBody>
@@ -3336,8 +3336,8 @@
         </p:nvSpPr>
         <p:spPr>
           <a:xfrm>
-            <a:off x="320040" y="1874519"/>
-            <a:ext cx="3703320" cy="2606040"/>
+            <a:off x="274320" y="2084831"/>
+            <a:ext cx="3749039" cy="2267712"/>
           </a:xfrm>
           <a:prstGeom prst="rect">
             <a:avLst/>
@@ -3381,8 +3381,8 @@
         </p:nvSpPr>
         <p:spPr>
           <a:xfrm>
-            <a:off x="457200" y="2011679"/>
-            <a:ext cx="3429000" cy="320040"/>
+            <a:off x="402336" y="2176271"/>
+            <a:ext cx="3493007" cy="292608"/>
           </a:xfrm>
           <a:prstGeom prst="rect">
             <a:avLst/>
@@ -3397,14 +3397,14 @@
           <a:p>
             <a:pPr algn="l"/>
             <a:r>
-              <a:rPr sz="1500" b="1">
+              <a:rPr sz="1400" b="1">
                 <a:solidFill>
                   <a:srgbClr val="8B1A2B"/>
                 </a:solidFill>
                 <a:latin typeface="Microsoft YaHei"/>
                 <a:ea typeface="Microsoft YaHei"/>
               </a:rPr>
-              <a:t>01  工程化AI提效：从个人能力到企…</a:t>
+              <a:t>01  从个人能力到企业级稳定产出</a:t>
             </a:r>
           </a:p>
         </p:txBody>
@@ -3417,8 +3417,8 @@
         </p:nvSpPr>
         <p:spPr>
           <a:xfrm>
-            <a:off x="484632" y="2377439"/>
-            <a:ext cx="3374136" cy="1965960"/>
+            <a:off x="402336" y="2487167"/>
+            <a:ext cx="3493007" cy="1764792"/>
           </a:xfrm>
           <a:prstGeom prst="rect">
             <a:avLst/>
@@ -3433,28 +3433,45 @@
           <a:p>
             <a:pPr algn="l">
               <a:spcAft>
-                <a:spcPts val="400"/>
+                <a:spcPts val="200"/>
               </a:spcAft>
             </a:pPr>
             <a:r>
-              <a:rPr sz="1200" b="1">
+              <a:rPr sz="1100" b="1">
                 <a:solidFill>
                   <a:srgbClr val="1A1A1A"/>
                 </a:solidFill>
                 <a:latin typeface="Microsoft YaHei"/>
                 <a:ea typeface="Microsoft YaHei"/>
               </a:rPr>
-              <a:t>目标路径：个人提效 → 企业提效，不是再堆Prompt，而是建设可规模化的工程体系。</a:t>
+              <a:t>友商若只做「个人Copilot渗透率」，难以过企级验收</a:t>
             </a:r>
           </a:p>
           <a:p>
             <a:pPr algn="l">
               <a:spcAft>
-                <a:spcPts val="400"/>
+                <a:spcPts val="200"/>
               </a:spcAft>
             </a:pPr>
             <a:r>
-              <a:rPr sz="1200" b="0">
+              <a:rPr sz="1100" b="0">
+                <a:solidFill>
+                  <a:srgbClr val="4A4A4A"/>
+                </a:solidFill>
+                <a:latin typeface="Microsoft YaHei"/>
+                <a:ea typeface="Microsoft YaHei"/>
+              </a:rPr>
+              <a:t>• 目标路径：个人提效 → 企业提效，不是再堆Prompt，而是建设可规模化的工程体系。</a:t>
+            </a:r>
+          </a:p>
+          <a:p>
+            <a:pPr algn="l">
+              <a:spcAft>
+                <a:spcPts val="200"/>
+              </a:spcAft>
+            </a:pPr>
+            <a:r>
+              <a:rPr sz="1100" b="0">
                 <a:solidFill>
                   <a:srgbClr val="4A4A4A"/>
                 </a:solidFill>
@@ -3467,11 +3484,11 @@
           <a:p>
             <a:pPr algn="l">
               <a:spcAft>
-                <a:spcPts val="400"/>
+                <a:spcPts val="200"/>
               </a:spcAft>
             </a:pPr>
             <a:r>
-              <a:rPr sz="1200" b="0">
+              <a:rPr sz="1100" b="0">
                 <a:solidFill>
                   <a:srgbClr val="4A4A4A"/>
                 </a:solidFill>
@@ -3491,8 +3508,8 @@
         </p:nvSpPr>
         <p:spPr>
           <a:xfrm>
-            <a:off x="4224528" y="1874519"/>
-            <a:ext cx="3703320" cy="2606040"/>
+            <a:off x="4187951" y="2084831"/>
+            <a:ext cx="3749039" cy="2267712"/>
           </a:xfrm>
           <a:prstGeom prst="rect">
             <a:avLst/>
@@ -3536,8 +3553,8 @@
         </p:nvSpPr>
         <p:spPr>
           <a:xfrm>
-            <a:off x="4361688" y="2011679"/>
-            <a:ext cx="3429000" cy="320040"/>
+            <a:off x="4315967" y="2176271"/>
+            <a:ext cx="3493007" cy="292608"/>
           </a:xfrm>
           <a:prstGeom prst="rect">
             <a:avLst/>
@@ -3552,14 +3569,14 @@
           <a:p>
             <a:pPr algn="l"/>
             <a:r>
-              <a:rPr sz="1500" b="1">
+              <a:rPr sz="1400" b="1">
                 <a:solidFill>
                   <a:srgbClr val="8B1A2B"/>
                 </a:solidFill>
                 <a:latin typeface="Microsoft YaHei"/>
                 <a:ea typeface="Microsoft YaHei"/>
               </a:rPr>
-              <a:t>02  三层架构：CEA AI效能平台…</a:t>
+              <a:t>02  三层架构</a:t>
             </a:r>
           </a:p>
         </p:txBody>
@@ -3572,8 +3589,8 @@
         </p:nvSpPr>
         <p:spPr>
           <a:xfrm>
-            <a:off x="4389120" y="2377439"/>
-            <a:ext cx="3374136" cy="1965960"/>
+            <a:off x="4315967" y="2487167"/>
+            <a:ext cx="3493007" cy="1764792"/>
           </a:xfrm>
           <a:prstGeom prst="rect">
             <a:avLst/>
@@ -3588,69 +3605,69 @@
           <a:p>
             <a:pPr algn="l">
               <a:spcAft>
-                <a:spcPts val="400"/>
+                <a:spcPts val="200"/>
               </a:spcAft>
             </a:pPr>
             <a:r>
-              <a:rPr sz="1200" b="1">
+              <a:rPr sz="1100" b="1">
                 <a:solidFill>
                   <a:srgbClr val="1A1A1A"/>
                 </a:solidFill>
                 <a:latin typeface="Microsoft YaHei"/>
                 <a:ea typeface="Microsoft YaHei"/>
               </a:rPr>
-              <a:t>第一层模型服务层基于阿里云PAI：推理网关（统一API/智能路由）、开源模型部署（…</a:t>
+              <a:t>可对标建设「模型层—工具MCP层—业务Agent层」分层，避免把企业系统能力直接硬编码进Prompt</a:t>
             </a:r>
           </a:p>
           <a:p>
             <a:pPr algn="l">
               <a:spcAft>
-                <a:spcPts val="400"/>
+                <a:spcPts val="200"/>
               </a:spcAft>
             </a:pPr>
             <a:r>
-              <a:rPr sz="1200" b="0">
+              <a:rPr sz="1100" b="0">
                 <a:solidFill>
                   <a:srgbClr val="4A4A4A"/>
                 </a:solidFill>
                 <a:latin typeface="Microsoft YaHei"/>
                 <a:ea typeface="Microsoft YaHei"/>
               </a:rPr>
-              <a:t>• 第二层HARNESS：桌面Agent框架（Open Code、DeepSeek Harness + CEA自有技能/插件）与云端长时任…</a:t>
+              <a:t>• 第一层模型服务层基于阿里云PAI：推理网关（统一API/智能路由）、开源模型部署（GLM/Qwen/DeepSeek/MiniMax）、后训练（数据集管理与开源微调）、GPU资源管理（NV GPU/IPU等）</a:t>
             </a:r>
           </a:p>
           <a:p>
             <a:pPr algn="l">
               <a:spcAft>
-                <a:spcPts val="400"/>
+                <a:spcPts val="200"/>
               </a:spcAft>
             </a:pPr>
             <a:r>
-              <a:rPr sz="1200" b="0">
+              <a:rPr sz="1100" b="0">
                 <a:solidFill>
                   <a:srgbClr val="4A4A4A"/>
                 </a:solidFill>
                 <a:latin typeface="Microsoft YaHei"/>
                 <a:ea typeface="Microsoft YaHei"/>
               </a:rPr>
-              <a:t>• 第三层业务应用：CEA Skill Hub（技能/插件/MCP）+ 软件研发/项目管理/故障分析/EE架构分析Agents，支撑故障归…</a:t>
+              <a:t>• 第二层HARNESS：桌面Agent框架（Open Code、DeepSeek Harness + CEA自有技能/插件）与云端长时任务Agent（统一Memory）</a:t>
             </a:r>
           </a:p>
           <a:p>
             <a:pPr algn="l">
               <a:spcAft>
-                <a:spcPts val="400"/>
+                <a:spcPts val="200"/>
               </a:spcAft>
             </a:pPr>
             <a:r>
-              <a:rPr sz="1200" b="0">
+              <a:rPr sz="1100" b="0">
                 <a:solidFill>
                   <a:srgbClr val="4A4A4A"/>
                 </a:solidFill>
                 <a:latin typeface="Microsoft YaHei"/>
                 <a:ea typeface="Microsoft YaHei"/>
               </a:rPr>
-              <a:t>• 横切能力贯穿三层：访问控制、安全、日志审计、合规治理。</a:t>
+              <a:t>• 第三层业务应用：CEA Skill Hub（技能/插件/MCP）+ 软件研发/项目管理/故障分析/EE架构分析Agents，支撑故障归因、软件研发、整车交付等系统</a:t>
             </a:r>
           </a:p>
         </p:txBody>
@@ -3663,8 +3680,8 @@
         </p:nvSpPr>
         <p:spPr>
           <a:xfrm>
-            <a:off x="8129016" y="1874519"/>
-            <a:ext cx="3703320" cy="2606040"/>
+            <a:off x="8101582" y="2084831"/>
+            <a:ext cx="3749039" cy="2267712"/>
           </a:xfrm>
           <a:prstGeom prst="rect">
             <a:avLst/>
@@ -3708,8 +3725,8 @@
         </p:nvSpPr>
         <p:spPr>
           <a:xfrm>
-            <a:off x="8266176" y="2011679"/>
-            <a:ext cx="3429000" cy="320040"/>
+            <a:off x="8229598" y="2176271"/>
+            <a:ext cx="3493007" cy="292608"/>
           </a:xfrm>
           <a:prstGeom prst="rect">
             <a:avLst/>
@@ -3724,14 +3741,14 @@
           <a:p>
             <a:pPr algn="l"/>
             <a:r>
-              <a:rPr sz="1500" b="1">
+              <a:rPr sz="1400" b="1">
                 <a:solidFill>
                   <a:srgbClr val="8B1A2B"/>
                 </a:solidFill>
                 <a:latin typeface="Microsoft YaHei"/>
                 <a:ea typeface="Microsoft YaHei"/>
               </a:rPr>
-              <a:t>03  案例：整车故障归因多Agent…</a:t>
+              <a:t>03  整车故障归因多Agent流水线</a:t>
             </a:r>
           </a:p>
         </p:txBody>
@@ -3744,8 +3761,8 @@
         </p:nvSpPr>
         <p:spPr>
           <a:xfrm>
-            <a:off x="8293608" y="2377439"/>
-            <a:ext cx="3374136" cy="1965960"/>
+            <a:off x="8229598" y="2487167"/>
+            <a:ext cx="3493007" cy="1764792"/>
           </a:xfrm>
           <a:prstGeom prst="rect">
             <a:avLst/>
@@ -3760,45 +3777,62 @@
           <a:p>
             <a:pPr algn="l">
               <a:spcAft>
-                <a:spcPts val="400"/>
+                <a:spcPts val="200"/>
               </a:spcAft>
             </a:pPr>
             <a:r>
-              <a:rPr sz="1200" b="1">
+              <a:rPr sz="1100" b="1">
                 <a:solidFill>
                   <a:srgbClr val="1A1A1A"/>
                 </a:solidFill>
                 <a:latin typeface="Microsoft YaHei"/>
                 <a:ea typeface="Microsoft YaHei"/>
               </a:rPr>
-              <a:t>业务侧打通整车测试工程师、系统架构师、子领域工程师协作，整合进整车研发流程，并接入…</a:t>
+              <a:t>高价值场景应「流程嵌入优先」：工单系统、IM、本体、代码图谱与Agent同闭环</a:t>
             </a:r>
           </a:p>
           <a:p>
             <a:pPr algn="l">
               <a:spcAft>
-                <a:spcPts val="400"/>
+                <a:spcPts val="200"/>
               </a:spcAft>
             </a:pPr>
             <a:r>
-              <a:rPr sz="1200" b="0">
+              <a:rPr sz="1100" b="0">
                 <a:solidFill>
                   <a:srgbClr val="4A4A4A"/>
                 </a:solidFill>
                 <a:latin typeface="Microsoft YaHei"/>
                 <a:ea typeface="Microsoft YaHei"/>
               </a:rPr>
-              <a:t>• 方案三步：相似度分析（工单RAG + 工单分析Agents）→ 定界分析/智能诊断（整车本体 + 定界Agents）→ 定位分析/代码…</a:t>
+              <a:t>• 业务侧打通整车测试工程师、系统架构师、子领域工程师协作，整合进整车研发流程，并接入Jira工单状态与IM机器人通知。</a:t>
             </a:r>
           </a:p>
           <a:p>
             <a:pPr algn="l">
               <a:spcAft>
-                <a:spcPts val="400"/>
+                <a:spcPts val="200"/>
               </a:spcAft>
             </a:pPr>
             <a:r>
-              <a:rPr sz="1200" b="0">
+              <a:rPr sz="1100" b="0">
+                <a:solidFill>
+                  <a:srgbClr val="4A4A4A"/>
+                </a:solidFill>
+                <a:latin typeface="Microsoft YaHei"/>
+                <a:ea typeface="Microsoft YaHei"/>
+              </a:rPr>
+              <a:t>• 方案三步：相似度分析（工单RAG + 工单分析Agents）→ 定界分析/智能诊断（整车本体 + 定界Agents）→ 定位分析/代码分析（代码图谱 + 定位Agents）</a:t>
+            </a:r>
+          </a:p>
+          <a:p>
+            <a:pPr algn="l">
+              <a:spcAft>
+                <a:spcPts val="200"/>
+              </a:spcAft>
+            </a:pPr>
+            <a:r>
+              <a:rPr sz="1100" b="0">
                 <a:solidFill>
                   <a:srgbClr val="4A4A4A"/>
                 </a:solidFill>
@@ -3818,8 +3852,8 @@
         </p:nvSpPr>
         <p:spPr>
           <a:xfrm>
-            <a:off x="320040" y="4617720"/>
-            <a:ext cx="7315200" cy="256032"/>
+            <a:off x="274320" y="4553712"/>
+            <a:ext cx="7315200" cy="237744"/>
           </a:xfrm>
           <a:prstGeom prst="rect">
             <a:avLst/>
@@ -3834,7 +3868,7 @@
           <a:p>
             <a:pPr algn="l"/>
             <a:r>
-              <a:rPr sz="1400" b="1">
+              <a:rPr sz="1300" b="1">
                 <a:solidFill>
                   <a:srgbClr val="1A1A1A"/>
                 </a:solidFill>
@@ -3854,8 +3888,8 @@
         </p:nvSpPr>
         <p:spPr>
           <a:xfrm>
-            <a:off x="320040" y="4910328"/>
-            <a:ext cx="1847088" cy="868680"/>
+            <a:off x="274320" y="4809744"/>
+            <a:ext cx="1874519" cy="960120"/>
           </a:xfrm>
           <a:prstGeom prst="rect">
             <a:avLst/>
@@ -3899,8 +3933,8 @@
         </p:nvSpPr>
         <p:spPr>
           <a:xfrm>
-            <a:off x="429768" y="4965192"/>
-            <a:ext cx="1664208" cy="201168"/>
+            <a:off x="365760" y="4864608"/>
+            <a:ext cx="1709927" cy="201168"/>
           </a:xfrm>
           <a:prstGeom prst="rect">
             <a:avLst/>
@@ -3922,7 +3956,7 @@
                 <a:latin typeface="Microsoft YaHei"/>
                 <a:ea typeface="Microsoft YaHei"/>
               </a:rPr>
-              <a:t>工程化AI提效：从个人…</a:t>
+              <a:t>工程化AI提效</a:t>
             </a:r>
           </a:p>
         </p:txBody>
@@ -3935,8 +3969,8 @@
         </p:nvSpPr>
         <p:spPr>
           <a:xfrm>
-            <a:off x="429768" y="5166360"/>
-            <a:ext cx="1664208" cy="237744"/>
+            <a:off x="365760" y="5065776"/>
+            <a:ext cx="1709927" cy="256032"/>
           </a:xfrm>
           <a:prstGeom prst="rect">
             <a:avLst/>
@@ -3958,7 +3992,7 @@
                 <a:latin typeface="Microsoft YaHei"/>
                 <a:ea typeface="Microsoft YaHei"/>
               </a:rPr>
-              <a:t>目标路径：个人提效 → 企业提…</a:t>
+              <a:t>核心口径</a:t>
             </a:r>
           </a:p>
         </p:txBody>
@@ -3971,8 +4005,8 @@
         </p:nvSpPr>
         <p:spPr>
           <a:xfrm>
-            <a:off x="429768" y="5413248"/>
-            <a:ext cx="1664208" cy="292608"/>
+            <a:off x="365760" y="5340096"/>
+            <a:ext cx="1709927" cy="365760"/>
           </a:xfrm>
           <a:prstGeom prst="rect">
             <a:avLst/>
@@ -3987,14 +4021,14 @@
           <a:p>
             <a:pPr algn="l"/>
             <a:r>
-              <a:rPr sz="1400" b="1">
+              <a:rPr sz="1200" b="1">
                 <a:solidFill>
                   <a:srgbClr val="8B1A2B"/>
                 </a:solidFill>
                 <a:latin typeface="Microsoft YaHei"/>
                 <a:ea typeface="Microsoft YaHei"/>
               </a:rPr>
-              <a:t>目标路径：个人提效 → 企…</a:t>
+              <a:t>目标路径：个人提效 → 企业提效，不是再堆Prompt</a:t>
             </a:r>
           </a:p>
         </p:txBody>
@@ -4007,8 +4041,8 @@
         </p:nvSpPr>
         <p:spPr>
           <a:xfrm>
-            <a:off x="2276856" y="4910328"/>
-            <a:ext cx="1847088" cy="868680"/>
+            <a:off x="2240279" y="4809744"/>
+            <a:ext cx="1874519" cy="960120"/>
           </a:xfrm>
           <a:prstGeom prst="rect">
             <a:avLst/>
@@ -4052,8 +4086,8 @@
         </p:nvSpPr>
         <p:spPr>
           <a:xfrm>
-            <a:off x="2386584" y="4965192"/>
-            <a:ext cx="1664208" cy="201168"/>
+            <a:off x="2331719" y="4864608"/>
+            <a:ext cx="1709927" cy="201168"/>
           </a:xfrm>
           <a:prstGeom prst="rect">
             <a:avLst/>
@@ -4075,7 +4109,7 @@
                 <a:latin typeface="Microsoft YaHei"/>
                 <a:ea typeface="Microsoft YaHei"/>
               </a:rPr>
-              <a:t>三层架构：CEA AI…</a:t>
+              <a:t>三层架构</a:t>
             </a:r>
           </a:p>
         </p:txBody>
@@ -4088,8 +4122,8 @@
         </p:nvSpPr>
         <p:spPr>
           <a:xfrm>
-            <a:off x="2386584" y="5166360"/>
-            <a:ext cx="1664208" cy="237744"/>
+            <a:off x="2331719" y="5065776"/>
+            <a:ext cx="1709927" cy="256032"/>
           </a:xfrm>
           <a:prstGeom prst="rect">
             <a:avLst/>
@@ -4111,7 +4145,7 @@
                 <a:latin typeface="Microsoft YaHei"/>
                 <a:ea typeface="Microsoft YaHei"/>
               </a:rPr>
-              <a:t>第一层模型服务层基于阿里云PA…</a:t>
+              <a:t>核心口径</a:t>
             </a:r>
           </a:p>
         </p:txBody>
@@ -4124,8 +4158,8 @@
         </p:nvSpPr>
         <p:spPr>
           <a:xfrm>
-            <a:off x="2386584" y="5413248"/>
-            <a:ext cx="1664208" cy="292608"/>
+            <a:off x="2331719" y="5340096"/>
+            <a:ext cx="1709927" cy="365760"/>
           </a:xfrm>
           <a:prstGeom prst="rect">
             <a:avLst/>
@@ -4140,14 +4174,14 @@
           <a:p>
             <a:pPr algn="l"/>
             <a:r>
-              <a:rPr sz="1400" b="1">
+              <a:rPr sz="1200" b="1">
                 <a:solidFill>
                   <a:srgbClr val="8B1A2B"/>
                 </a:solidFill>
                 <a:latin typeface="Microsoft YaHei"/>
                 <a:ea typeface="Microsoft YaHei"/>
               </a:rPr>
-              <a:t>第一层模型服务层基于阿里云…</a:t>
+              <a:t>第一层模型服务层基于阿里云PAI：推理网关（统一API/智能路由）、开源模型部署（GLM/Qwen/DeepSeek/MiniMax）、后训练（数据集管理与开源微调）、GPU资源管理（NV GPU/IPU等）。</a:t>
             </a:r>
           </a:p>
         </p:txBody>
@@ -4160,8 +4194,8 @@
         </p:nvSpPr>
         <p:spPr>
           <a:xfrm>
-            <a:off x="4233672" y="4910328"/>
-            <a:ext cx="1847088" cy="868680"/>
+            <a:off x="4206238" y="4809744"/>
+            <a:ext cx="1874519" cy="960120"/>
           </a:xfrm>
           <a:prstGeom prst="rect">
             <a:avLst/>
@@ -4205,8 +4239,8 @@
         </p:nvSpPr>
         <p:spPr>
           <a:xfrm>
-            <a:off x="4343400" y="4965192"/>
-            <a:ext cx="1664208" cy="201168"/>
+            <a:off x="4297678" y="4864608"/>
+            <a:ext cx="1709927" cy="201168"/>
           </a:xfrm>
           <a:prstGeom prst="rect">
             <a:avLst/>
@@ -4228,7 +4262,7 @@
                 <a:latin typeface="Microsoft YaHei"/>
                 <a:ea typeface="Microsoft YaHei"/>
               </a:rPr>
-              <a:t>案例：整车故障归因多A…</a:t>
+              <a:t>案例</a:t>
             </a:r>
           </a:p>
         </p:txBody>
@@ -4241,8 +4275,8 @@
         </p:nvSpPr>
         <p:spPr>
           <a:xfrm>
-            <a:off x="4343400" y="5166360"/>
-            <a:ext cx="1664208" cy="237744"/>
+            <a:off x="4297678" y="5065776"/>
+            <a:ext cx="1709927" cy="256032"/>
           </a:xfrm>
           <a:prstGeom prst="rect">
             <a:avLst/>
@@ -4264,7 +4298,7 @@
                 <a:latin typeface="Microsoft YaHei"/>
                 <a:ea typeface="Microsoft YaHei"/>
               </a:rPr>
-              <a:t>定位/代码分析小于20分钟</a:t>
+              <a:t>演讲口径</a:t>
             </a:r>
           </a:p>
         </p:txBody>
@@ -4277,8 +4311,8 @@
         </p:nvSpPr>
         <p:spPr>
           <a:xfrm>
-            <a:off x="4343400" y="5413248"/>
-            <a:ext cx="1664208" cy="292608"/>
+            <a:off x="4297678" y="5340096"/>
+            <a:ext cx="1709927" cy="365760"/>
           </a:xfrm>
           <a:prstGeom prst="rect">
             <a:avLst/>
@@ -4293,7 +4327,7 @@
           <a:p>
             <a:pPr algn="l"/>
             <a:r>
-              <a:rPr sz="1400" b="1">
+              <a:rPr sz="1200" b="1">
                 <a:solidFill>
                   <a:srgbClr val="8B1A2B"/>
                 </a:solidFill>
@@ -4313,8 +4347,8 @@
         </p:nvSpPr>
         <p:spPr>
           <a:xfrm>
-            <a:off x="6190488" y="4910328"/>
-            <a:ext cx="1847088" cy="868680"/>
+            <a:off x="6172197" y="4809744"/>
+            <a:ext cx="1874519" cy="960120"/>
           </a:xfrm>
           <a:prstGeom prst="rect">
             <a:avLst/>
@@ -4358,8 +4392,8 @@
         </p:nvSpPr>
         <p:spPr>
           <a:xfrm>
-            <a:off x="6300216" y="4965192"/>
-            <a:ext cx="1664208" cy="201168"/>
+            <a:off x="6263637" y="4864608"/>
+            <a:ext cx="1709927" cy="201168"/>
           </a:xfrm>
           <a:prstGeom prst="rect">
             <a:avLst/>
@@ -4381,7 +4415,7 @@
                 <a:latin typeface="Microsoft YaHei"/>
                 <a:ea typeface="Microsoft YaHei"/>
               </a:rPr>
-              <a:t>关键技术：LLM结合符…</a:t>
+              <a:t>案例·2</a:t>
             </a:r>
           </a:p>
         </p:txBody>
@@ -4394,8 +4428,8 @@
         </p:nvSpPr>
         <p:spPr>
           <a:xfrm>
-            <a:off x="6300216" y="5166360"/>
-            <a:ext cx="1664208" cy="237744"/>
+            <a:off x="6263637" y="5065776"/>
+            <a:ext cx="1709927" cy="256032"/>
           </a:xfrm>
           <a:prstGeom prst="rect">
             <a:avLst/>
@@ -4417,7 +4451,7 @@
                 <a:latin typeface="Microsoft YaHei"/>
                 <a:ea typeface="Microsoft YaHei"/>
               </a:rPr>
-              <a:t>局限：概率统计带来幻觉与多跳推…</a:t>
+              <a:t>演讲口径</a:t>
             </a:r>
           </a:p>
         </p:txBody>
@@ -4430,8 +4464,8 @@
         </p:nvSpPr>
         <p:spPr>
           <a:xfrm>
-            <a:off x="6300216" y="5413248"/>
-            <a:ext cx="1664208" cy="292608"/>
+            <a:off x="6263637" y="5340096"/>
+            <a:ext cx="1709927" cy="365760"/>
           </a:xfrm>
           <a:prstGeom prst="rect">
             <a:avLst/>
@@ -4446,14 +4480,14 @@
           <a:p>
             <a:pPr algn="l"/>
             <a:r>
-              <a:rPr sz="1400" b="1">
+              <a:rPr sz="1200" b="1">
                 <a:solidFill>
                   <a:srgbClr val="8B1A2B"/>
                 </a:solidFill>
                 <a:latin typeface="Microsoft YaHei"/>
                 <a:ea typeface="Microsoft YaHei"/>
               </a:rPr>
-              <a:t>局限：概率统计带来幻觉与多…</a:t>
+              <a:t>定位/代码分析小于20分钟</a:t>
             </a:r>
           </a:p>
         </p:txBody>
@@ -4466,8 +4500,8 @@
         </p:nvSpPr>
         <p:spPr>
           <a:xfrm>
-            <a:off x="8147304" y="4910328"/>
-            <a:ext cx="1847088" cy="868680"/>
+            <a:off x="8138156" y="4809744"/>
+            <a:ext cx="1874519" cy="960120"/>
           </a:xfrm>
           <a:prstGeom prst="rect">
             <a:avLst/>
@@ -4511,8 +4545,8 @@
         </p:nvSpPr>
         <p:spPr>
           <a:xfrm>
-            <a:off x="8257032" y="4965192"/>
-            <a:ext cx="1664208" cy="201168"/>
+            <a:off x="8229596" y="4864608"/>
+            <a:ext cx="1709927" cy="201168"/>
           </a:xfrm>
           <a:prstGeom prst="rect">
             <a:avLst/>
@@ -4534,7 +4568,7 @@
                 <a:latin typeface="Microsoft YaHei"/>
                 <a:ea typeface="Microsoft YaHei"/>
               </a:rPr>
-              <a:t>业务领域拓展与平台持续…</a:t>
+              <a:t>关键技术</a:t>
             </a:r>
           </a:p>
         </p:txBody>
@@ -4547,8 +4581,8 @@
         </p:nvSpPr>
         <p:spPr>
           <a:xfrm>
-            <a:off x="8257032" y="5166360"/>
-            <a:ext cx="1664208" cy="237744"/>
+            <a:off x="8229596" y="5065776"/>
+            <a:ext cx="1709927" cy="256032"/>
           </a:xfrm>
           <a:prstGeom prst="rect">
             <a:avLst/>
@@ -4570,7 +4604,7 @@
                 <a:latin typeface="Microsoft YaHei"/>
                 <a:ea typeface="Microsoft YaHei"/>
               </a:rPr>
-              <a:t>双环演进：上环不断拓展业务领域…</a:t>
+              <a:t>核心口径</a:t>
             </a:r>
           </a:p>
         </p:txBody>
@@ -4583,8 +4617,8 @@
         </p:nvSpPr>
         <p:spPr>
           <a:xfrm>
-            <a:off x="8257032" y="5413248"/>
-            <a:ext cx="1664208" cy="292608"/>
+            <a:off x="8229596" y="5340096"/>
+            <a:ext cx="1709927" cy="365760"/>
           </a:xfrm>
           <a:prstGeom prst="rect">
             <a:avLst/>
@@ -4599,14 +4633,14 @@
           <a:p>
             <a:pPr algn="l"/>
             <a:r>
-              <a:rPr sz="1400" b="1">
+              <a:rPr sz="1200" b="1">
                 <a:solidFill>
                   <a:srgbClr val="8B1A2B"/>
                 </a:solidFill>
                 <a:latin typeface="Microsoft YaHei"/>
                 <a:ea typeface="Microsoft YaHei"/>
               </a:rPr>
-              <a:t>平台版本：V0.5 → V0.8</a:t>
+              <a:t>局限：概率统计带来幻觉与多跳推理薄弱；</a:t>
             </a:r>
           </a:p>
         </p:txBody>
@@ -4619,8 +4653,8 @@
         </p:nvSpPr>
         <p:spPr>
           <a:xfrm>
-            <a:off x="10104120" y="4910328"/>
-            <a:ext cx="1847088" cy="868680"/>
+            <a:off x="10104115" y="4809744"/>
+            <a:ext cx="1874519" cy="960120"/>
           </a:xfrm>
           <a:prstGeom prst="rect">
             <a:avLst/>
@@ -4664,8 +4698,8 @@
         </p:nvSpPr>
         <p:spPr>
           <a:xfrm>
-            <a:off x="10213848" y="4965192"/>
-            <a:ext cx="1664208" cy="201168"/>
+            <a:off x="10195555" y="4864608"/>
+            <a:ext cx="1709927" cy="201168"/>
           </a:xfrm>
           <a:prstGeom prst="rect">
             <a:avLst/>
@@ -4687,7 +4721,7 @@
                 <a:latin typeface="Microsoft YaHei"/>
                 <a:ea typeface="Microsoft YaHei"/>
               </a:rPr>
-              <a:t>议题结构：必要性—架构…</a:t>
+              <a:t>平台版本</a:t>
             </a:r>
           </a:p>
         </p:txBody>
@@ -4700,8 +4734,8 @@
         </p:nvSpPr>
         <p:spPr>
           <a:xfrm>
-            <a:off x="10213848" y="5166360"/>
-            <a:ext cx="1664208" cy="237744"/>
+            <a:off x="10195555" y="5065776"/>
+            <a:ext cx="1709927" cy="256032"/>
           </a:xfrm>
           <a:prstGeom prst="rect">
             <a:avLst/>
@@ -4723,7 +4757,7 @@
                 <a:latin typeface="Microsoft YaHei"/>
                 <a:ea typeface="Microsoft YaHei"/>
               </a:rPr>
-              <a:t>01 工程化AI提效：对企业而…</a:t>
+              <a:t>平台版本：V0.5</a:t>
             </a:r>
           </a:p>
         </p:txBody>
@@ -4736,8 +4770,8 @@
         </p:nvSpPr>
         <p:spPr>
           <a:xfrm>
-            <a:off x="10213848" y="5413248"/>
-            <a:ext cx="1664208" cy="292608"/>
+            <a:off x="10195555" y="5340096"/>
+            <a:ext cx="1709927" cy="365760"/>
           </a:xfrm>
           <a:prstGeom prst="rect">
             <a:avLst/>
@@ -4752,14 +4786,14 @@
           <a:p>
             <a:pPr algn="l"/>
             <a:r>
-              <a:rPr sz="1400" b="1">
+              <a:rPr sz="1200" b="1">
                 <a:solidFill>
                   <a:srgbClr val="8B1A2B"/>
                 </a:solidFill>
                 <a:latin typeface="Microsoft YaHei"/>
                 <a:ea typeface="Microsoft YaHei"/>
               </a:rPr>
-              <a:t>01 工程化AI提效：对企…</a:t>
+              <a:t>V0.8</a:t>
             </a:r>
           </a:p>
         </p:txBody>
@@ -4772,8 +4806,8 @@
         </p:nvSpPr>
         <p:spPr>
           <a:xfrm>
-            <a:off x="0" y="5989320"/>
-            <a:ext cx="12191695" cy="868680"/>
+            <a:off x="0" y="5870448"/>
+            <a:ext cx="12191695" cy="987552"/>
           </a:xfrm>
           <a:prstGeom prst="rect">
             <a:avLst/>
@@ -4815,8 +4849,8 @@
         </p:nvSpPr>
         <p:spPr>
           <a:xfrm>
-            <a:off x="365760" y="6080760"/>
-            <a:ext cx="11430000" cy="256032"/>
+            <a:off x="320040" y="5943600"/>
+            <a:ext cx="11521440" cy="502920"/>
           </a:xfrm>
           <a:prstGeom prst="rect">
             <a:avLst/>
@@ -4831,14 +4865,14 @@
           <a:p>
             <a:pPr algn="l"/>
             <a:r>
-              <a:rPr sz="1200" b="1">
+              <a:rPr sz="1100" b="1">
                 <a:solidFill>
                   <a:srgbClr val="1A1A1A"/>
                 </a:solidFill>
                 <a:latin typeface="Microsoft YaHei"/>
                 <a:ea typeface="Microsoft YaHei"/>
               </a:rPr>
-              <a:t>可落地动作：企业工程化AI的胜负手不是单点模型，而是「知识骨架 + MCP工具原子化 + Agent分工 + 合规横切」。；汽车软件场景证明：RAG/本体/代码图谱与多Agent流水线结合，可将定界与定位压缩到约20分钟量级。</a:t>
+              <a:t>可落地动作：企业工程化AI的胜负手不是单点模型，而是「知识骨架 + MCP工具原子化 + Agent分工 + 合规横切」；汽车软件场景证明：RAG/本体/代码图谱与多Agent流水线结合，可将定界与定位压缩到约20分钟量级；友商建设内部效能平台时，应同步设计桌面短链路与云端长时任务，并把知识资产纳入版本管理与审计。</a:t>
             </a:r>
           </a:p>
         </p:txBody>
@@ -4851,8 +4885,8 @@
         </p:nvSpPr>
         <p:spPr>
           <a:xfrm>
-            <a:off x="365760" y="6373368"/>
-            <a:ext cx="11430000" cy="256032"/>
+            <a:off x="320040" y="6437376"/>
+            <a:ext cx="11521440" cy="256032"/>
           </a:xfrm>
           <a:prstGeom prst="rect">
             <a:avLst/>
@@ -4867,7 +4901,7 @@
           <a:p>
             <a:pPr algn="l"/>
             <a:r>
-              <a:rPr sz="1000" b="0">
+              <a:rPr sz="900" b="0">
                 <a:solidFill>
                   <a:srgbClr val="6B6B6B"/>
                 </a:solidFill>
@@ -5109,7 +5143,7 @@
         <p:spPr>
           <a:xfrm>
             <a:off x="429768" y="1143000"/>
-            <a:ext cx="3496970" cy="292608"/>
+            <a:ext cx="3496970" cy="384048"/>
           </a:xfrm>
           <a:prstGeom prst="rect">
             <a:avLst/>
@@ -5131,7 +5165,7 @@
                 <a:latin typeface="Microsoft YaHei"/>
                 <a:ea typeface="Microsoft YaHei"/>
               </a:rPr>
-              <a:t>工程化AI提效：从个人能力到企业级稳定…</a:t>
+              <a:t>从个人能力到企业级稳定产出</a:t>
             </a:r>
           </a:p>
         </p:txBody>
@@ -5152,7 +5186,7 @@
         </p:blipFill>
         <p:spPr>
           <a:xfrm>
-            <a:off x="429768" y="1928092"/>
+            <a:off x="429768" y="1946380"/>
             <a:ext cx="3496970" cy="2965239"/>
           </a:xfrm>
           <a:prstGeom prst="rect">
@@ -5250,7 +5284,7 @@
         <p:spPr>
           <a:xfrm>
             <a:off x="4347362" y="1143000"/>
-            <a:ext cx="3496970" cy="292608"/>
+            <a:ext cx="3496970" cy="384048"/>
           </a:xfrm>
           <a:prstGeom prst="rect">
             <a:avLst/>
@@ -5272,7 +5306,7 @@
                 <a:latin typeface="Microsoft YaHei"/>
                 <a:ea typeface="Microsoft YaHei"/>
               </a:rPr>
-              <a:t>三层架构：CEA AI效能平台（模型服…</a:t>
+              <a:t>三层架构</a:t>
             </a:r>
           </a:p>
         </p:txBody>
@@ -5293,7 +5327,7 @@
         </p:blipFill>
         <p:spPr>
           <a:xfrm>
-            <a:off x="4347362" y="1928092"/>
+            <a:off x="4347362" y="1946380"/>
             <a:ext cx="3496970" cy="2965239"/>
           </a:xfrm>
           <a:prstGeom prst="rect">
@@ -5332,7 +5366,7 @@
                 <a:latin typeface="Microsoft YaHei"/>
                 <a:ea typeface="Microsoft YaHei"/>
               </a:rPr>
-              <a:t>三层架构：CEA AI效能平台（模型服务 / HARN…</a:t>
+              <a:t>三层架构：CEA AI效能平台（模型服务 / HARNESS / 业务应用）</a:t>
             </a:r>
           </a:p>
         </p:txBody>
@@ -5391,7 +5425,7 @@
         <p:spPr>
           <a:xfrm>
             <a:off x="8264956" y="1143000"/>
-            <a:ext cx="3496970" cy="292608"/>
+            <a:ext cx="3496970" cy="384048"/>
           </a:xfrm>
           <a:prstGeom prst="rect">
             <a:avLst/>
@@ -5413,7 +5447,7 @@
                 <a:latin typeface="Microsoft YaHei"/>
                 <a:ea typeface="Microsoft YaHei"/>
               </a:rPr>
-              <a:t>定界分析平均约20分钟</a:t>
+              <a:t>定界分析平均约20分钟 · 定位/代码分析小于20分钟</a:t>
             </a:r>
           </a:p>
         </p:txBody>
@@ -5434,7 +5468,7 @@
         </p:blipFill>
         <p:spPr>
           <a:xfrm>
-            <a:off x="8264956" y="1928092"/>
+            <a:off x="8264956" y="1946380"/>
             <a:ext cx="3496970" cy="2965239"/>
           </a:xfrm>
           <a:prstGeom prst="rect">

--- a/yunqi-2026-pai-forum/docs/洞察一页-06-企业工程化AI提效：知识、流程和智能系统.pptx
+++ b/yunqi-2026-pai-forum/docs/洞察一页-06-企业工程化AI提效：知识、流程和智能系统.pptx
@@ -3323,7 +3323,7 @@
                 <a:latin typeface="Microsoft YaHei"/>
                 <a:ea typeface="Microsoft YaHei"/>
               </a:rPr>
-              <a:t>一句话判断：蒋忠波分享大众CARIAD如何把「个人用好大模型」升级为「企业工程化AI提效」。核心矛盾是LLM的概率性本质与汽车软件工程对规模、复杂度、协作与稳定产出的刚性要求。</a:t>
+              <a:t>一句话判断：CARIAD 知识、流程和智能系统——LLM的概率性本质与汽车软件工程对规模、复杂度、协作与稳定产出的刚性要求。演讲给出CEA AI效能平台三层架构（模型服务 / HARNESS / 业务应用），并以整车故障归因系统证明：用知识骨架引导符号推理，才能把Agent从演示变成可审计、可版本管理的工程资产。</a:t>
             </a:r>
           </a:p>
         </p:txBody>
@@ -3956,7 +3956,7 @@
                 <a:latin typeface="Microsoft YaHei"/>
                 <a:ea typeface="Microsoft YaHei"/>
               </a:rPr>
-              <a:t>工程化AI提效</a:t>
+              <a:t>案例</a:t>
             </a:r>
           </a:p>
         </p:txBody>
@@ -3992,7 +3992,7 @@
                 <a:latin typeface="Microsoft YaHei"/>
                 <a:ea typeface="Microsoft YaHei"/>
               </a:rPr>
-              <a:t>核心口径</a:t>
+              <a:t>关键能力</a:t>
             </a:r>
           </a:p>
         </p:txBody>
@@ -4028,7 +4028,7 @@
                 <a:latin typeface="Microsoft YaHei"/>
                 <a:ea typeface="Microsoft YaHei"/>
               </a:rPr>
-              <a:t>目标路径：个人提效 → 企业提效，不是再堆Prompt</a:t>
+              <a:t>定界分析平均约20分钟</a:t>
             </a:r>
           </a:p>
         </p:txBody>
@@ -4109,7 +4109,7 @@
                 <a:latin typeface="Microsoft YaHei"/>
                 <a:ea typeface="Microsoft YaHei"/>
               </a:rPr>
-              <a:t>三层架构</a:t>
+              <a:t>案例</a:t>
             </a:r>
           </a:p>
         </p:txBody>
@@ -4145,7 +4145,7 @@
                 <a:latin typeface="Microsoft YaHei"/>
                 <a:ea typeface="Microsoft YaHei"/>
               </a:rPr>
-              <a:t>核心口径</a:t>
+              <a:t>关键能力</a:t>
             </a:r>
           </a:p>
         </p:txBody>
@@ -4181,7 +4181,7 @@
                 <a:latin typeface="Microsoft YaHei"/>
                 <a:ea typeface="Microsoft YaHei"/>
               </a:rPr>
-              <a:t>第一层模型服务层基于阿里云PAI：推理网关（统一API/智能路由）、开源模型部署（GLM/Qwen/DeepSeek/MiniMax）、后训练（数据集管理与开源微调）、GPU资源管理（NV GPU/IPU等）。</a:t>
+              <a:t>定位/代码分析小于20分钟</a:t>
             </a:r>
           </a:p>
         </p:txBody>
@@ -4262,7 +4262,7 @@
                 <a:latin typeface="Microsoft YaHei"/>
                 <a:ea typeface="Microsoft YaHei"/>
               </a:rPr>
-              <a:t>案例</a:t>
+              <a:t>业务领域拓展与平台持续优化（V0.5→V0.8）</a:t>
             </a:r>
           </a:p>
         </p:txBody>
@@ -4298,7 +4298,7 @@
                 <a:latin typeface="Microsoft YaHei"/>
                 <a:ea typeface="Microsoft YaHei"/>
               </a:rPr>
-              <a:t>演讲口径</a:t>
+              <a:t>平台版本：V0.5</a:t>
             </a:r>
           </a:p>
         </p:txBody>
@@ -4334,7 +4334,7 @@
                 <a:latin typeface="Microsoft YaHei"/>
                 <a:ea typeface="Microsoft YaHei"/>
               </a:rPr>
-              <a:t>定界分析平均约20分钟</a:t>
+              <a:t>V0.8</a:t>
             </a:r>
           </a:p>
         </p:txBody>
@@ -4415,7 +4415,7 @@
                 <a:latin typeface="Microsoft YaHei"/>
                 <a:ea typeface="Microsoft YaHei"/>
               </a:rPr>
-              <a:t>案例·2</a:t>
+              <a:t>01 工程化AI提效</a:t>
             </a:r>
           </a:p>
         </p:txBody>
@@ -4451,7 +4451,7 @@
                 <a:latin typeface="Microsoft YaHei"/>
                 <a:ea typeface="Microsoft YaHei"/>
               </a:rPr>
-              <a:t>演讲口径</a:t>
+              <a:t>议题结构</a:t>
             </a:r>
           </a:p>
         </p:txBody>
@@ -4487,7 +4487,7 @@
                 <a:latin typeface="Microsoft YaHei"/>
                 <a:ea typeface="Microsoft YaHei"/>
               </a:rPr>
-              <a:t>定位/代码分析小于20分钟</a:t>
+              <a:t>对企业而言的必要性与需解决的问题。</a:t>
             </a:r>
           </a:p>
         </p:txBody>
@@ -4568,7 +4568,7 @@
                 <a:latin typeface="Microsoft YaHei"/>
                 <a:ea typeface="Microsoft YaHei"/>
               </a:rPr>
-              <a:t>关键技术</a:t>
+              <a:t>局限</a:t>
             </a:r>
           </a:p>
         </p:txBody>
@@ -4604,7 +4604,7 @@
                 <a:latin typeface="Microsoft YaHei"/>
                 <a:ea typeface="Microsoft YaHei"/>
               </a:rPr>
-              <a:t>核心口径</a:t>
+              <a:t>关键技术</a:t>
             </a:r>
           </a:p>
         </p:txBody>
@@ -4640,7 +4640,7 @@
                 <a:latin typeface="Microsoft YaHei"/>
                 <a:ea typeface="Microsoft YaHei"/>
               </a:rPr>
-              <a:t>局限：概率统计带来幻觉与多跳推理薄弱；</a:t>
+              <a:t>概率统计带来幻觉与多跳推理薄弱；</a:t>
             </a:r>
           </a:p>
         </p:txBody>
@@ -4721,7 +4721,7 @@
                 <a:latin typeface="Microsoft YaHei"/>
                 <a:ea typeface="Microsoft YaHei"/>
               </a:rPr>
-              <a:t>平台版本</a:t>
+              <a:t>工程化AI提效</a:t>
             </a:r>
           </a:p>
         </p:txBody>
@@ -4757,7 +4757,7 @@
                 <a:latin typeface="Microsoft YaHei"/>
                 <a:ea typeface="Microsoft YaHei"/>
               </a:rPr>
-              <a:t>平台版本：V0.5</a:t>
+              <a:t>目标路径：个人提效</a:t>
             </a:r>
           </a:p>
         </p:txBody>
@@ -4793,7 +4793,7 @@
                 <a:latin typeface="Microsoft YaHei"/>
                 <a:ea typeface="Microsoft YaHei"/>
               </a:rPr>
-              <a:t>V0.8</a:t>
+              <a:t>企业提效，不是再堆Prompt，而是建设可规模化的工程体系。</a:t>
             </a:r>
           </a:p>
         </p:txBody>
@@ -4872,7 +4872,7 @@
                 <a:latin typeface="Microsoft YaHei"/>
                 <a:ea typeface="Microsoft YaHei"/>
               </a:rPr>
-              <a:t>可落地动作：企业工程化AI的胜负手不是单点模型，而是「知识骨架 + MCP工具原子化 + Agent分工 + 合规横切」；汽车软件场景证明：RAG/本体/代码图谱与多Agent流水线结合，可将定界与定位压缩到约20分钟量级；友商建设内部效能平台时，应同步设计桌面短链路与云端长时任务，并把知识资产纳入版本管理与审计。</a:t>
+              <a:t>启示要点：企业工程化AI的胜负手不是单点模型，而是「知识骨架 + MCP工具原子化 + Agent分工 + 合规横切」；汽车软件场景证明：RAG/本体/代码图谱与多Agent流水线结合，可将定界与定位压缩到约20分钟量级；</a:t>
             </a:r>
           </a:p>
         </p:txBody>

--- a/yunqi-2026-pai-forum/docs/洞察一页-06-企业工程化AI提效：知识、流程和智能系统.pptx
+++ b/yunqi-2026-pai-forum/docs/洞察一页-06-企业工程化AI提效：知识、流程和智能系统.pptx
@@ -3323,7 +3323,7 @@
                 <a:latin typeface="Microsoft YaHei"/>
                 <a:ea typeface="Microsoft YaHei"/>
               </a:rPr>
-              <a:t>一句话判断：CARIAD 知识、流程和智能系统——LLM的概率性本质与汽车软件工程对规模、复杂度、协作与稳定产出的刚性要求。演讲给出CEA AI效能平台三层架构（模型服务 / HARNESS / 业务应用），并以整车故障归因系统证明：用知识骨架引导符号推理，才能把Agent从演示变成可审计、可版本管理的工程资产。</a:t>
+              <a:t>一句话判断：CARIAD 知识、流程和智能系统——LLM的概率性本质与汽车软件工程对规模、复杂度、协作与稳定产出的刚性要求。CEA AI效能平台三层架构（模型服务 / HARNESS / 业务应用），并以整车故障归因系统证明：用知识骨架引导符号推理，才能把Agent从演示变成可审计、可版本管理的工程资产。</a:t>
             </a:r>
           </a:p>
         </p:txBody>
@@ -3788,7 +3788,7 @@
                 <a:latin typeface="Microsoft YaHei"/>
                 <a:ea typeface="Microsoft YaHei"/>
               </a:rPr>
-              <a:t>高价值场景应「流程嵌入优先」：工单系统、IM、本体、代码图谱与Agent同闭环</a:t>
+              <a:t>高价值场景应「流程嵌入优先」：工单系统、IM、本体、代码图谱与Agent同闭环。</a:t>
             </a:r>
           </a:p>
           <a:p>

--- a/yunqi-2026-pai-forum/docs/洞察一页-06-企业工程化AI提效：知识、流程和智能系统.pptx
+++ b/yunqi-2026-pai-forum/docs/洞察一页-06-企业工程化AI提效：知识、流程和智能系统.pptx
@@ -3444,7 +3444,7 @@
                 <a:latin typeface="Microsoft YaHei"/>
                 <a:ea typeface="Microsoft YaHei"/>
               </a:rPr>
-              <a:t>友商若只做「个人Copilot渗透率」，难以过企级验收</a:t>
+              <a:t>只做「个人Copilot渗透率」，难以过企级验收</a:t>
             </a:r>
           </a:p>
           <a:p>
@@ -4872,7 +4872,7 @@
                 <a:latin typeface="Microsoft YaHei"/>
                 <a:ea typeface="Microsoft YaHei"/>
               </a:rPr>
-              <a:t>启示要点：企业工程化AI的胜负手不是单点模型，而是「知识骨架 + MCP工具原子化 + Agent分工 + 合规横切」；汽车软件场景证明：RAG/本体/代码图谱与多Agent流水线结合，可将定界与定位压缩到约20分钟量级；</a:t>
+              <a:t>启示要点：企业工程化AI的胜负手不是单点模型，而是「知识骨架 + MCP工具原子化 + Agent分工 + 合规横切」；汽车软件场景证明：RAG/本体/代码图谱与多Agent流水线结合，可将定界与定位压缩到约20分钟量级。</a:t>
             </a:r>
           </a:p>
         </p:txBody>
